--- a/Fluctus_Laadplan_Saint_Leger.pptx
+++ b/Fluctus_Laadplan_Saint_Leger.pptx
@@ -118,7 +118,7 @@
 </p:presentation>
 </file>
 
-<file path=ppt/charts/chart394.xml><?xml version="1.0" encoding="utf-8"?>
+<file path=ppt/charts/chart395.xml><?xml version="1.0" encoding="utf-8"?>
 <c:chartSpace xmlns:c="http://schemas.openxmlformats.org/drawingml/2006/chart" xmlns:a="http://schemas.openxmlformats.org/drawingml/2006/main" xmlns:r="http://schemas.openxmlformats.org/officeDocument/2006/relationships">
   <c:date1904 val="0"/>
   <c:roundedCorners val="1"/>
@@ -10526,7 +10526,46 @@
       </p:sp>
       <p:sp>
         <p:nvSpPr>
-          <p:cNvPr id="63" name="Shape 61"/>
+          <p:cNvPr id="63" name="Text 61"/>
+          <p:cNvSpPr/>
+          <p:nvPr/>
+        </p:nvSpPr>
+        <p:spPr>
+          <a:xfrm>
+            <a:off x="640080" y="6071616"/>
+            <a:ext cx="10058400" cy="237744"/>
+          </a:xfrm>
+          <a:prstGeom prst="rect">
+            <a:avLst/>
+          </a:prstGeom>
+          <a:noFill/>
+          <a:ln/>
+        </p:spPr>
+        <p:txBody>
+          <a:bodyPr wrap="square" lIns="0" tIns="0" rIns="0" bIns="0" rtlCol="0" anchor="ctr"/>
+          <a:lstStyle/>
+          <a:p>
+            <a:pPr indent="0" marL="0">
+              <a:buNone/>
+            </a:pPr>
+            <a:r>
+              <a:rPr lang="en-US" sz="800" i="1" dirty="0">
+                <a:solidFill>
+                  <a:srgbClr val="5A6473"/>
+                </a:solidFill>
+                <a:latin typeface="Arial" pitchFamily="34" charset="0"/>
+                <a:ea typeface="Arial" pitchFamily="34" charset="-122"/>
+                <a:cs typeface="Arial" pitchFamily="34" charset="-120"/>
+              </a:rPr>
+              <a:t>Bron bestaande laadpunten: Departement Mobiliteit en Openbare Werken (Vlaanderen).</a:t>
+            </a:r>
+            <a:endParaRPr lang="en-US" sz="800" dirty="0"/>
+          </a:p>
+        </p:txBody>
+      </p:sp>
+      <p:sp>
+        <p:nvSpPr>
+          <p:cNvPr id="64" name="Shape 62"/>
           <p:cNvSpPr/>
           <p:nvPr/>
         </p:nvSpPr>
@@ -10546,7 +10585,7 @@
       </p:sp>
       <p:pic>
         <p:nvPicPr>
-          <p:cNvPr id="64" name="Image 0" descr="preencoded.png">    </p:cNvPr>
+          <p:cNvPr id="65" name="Image 0" descr="preencoded.png">    </p:cNvPr>
           <p:cNvPicPr>
             <a:picLocks noChangeAspect="1"/>
           </p:cNvPicPr>
@@ -10570,7 +10609,7 @@
       </p:pic>
       <p:sp>
         <p:nvSpPr>
-          <p:cNvPr id="65" name="Text 62"/>
+          <p:cNvPr id="66" name="Text 63"/>
           <p:cNvSpPr/>
           <p:nvPr/>
         </p:nvSpPr>
@@ -10612,7 +10651,7 @@
       </p:sp>
       <p:sp>
         <p:nvSpPr>
-          <p:cNvPr id="66" name="Shape 63"/>
+          <p:cNvPr id="67" name="Shape 64"/>
           <p:cNvSpPr/>
           <p:nvPr/>
         </p:nvSpPr>
@@ -10632,7 +10671,7 @@
       </p:sp>
       <p:pic>
         <p:nvPicPr>
-          <p:cNvPr id="67" name="Image 1" descr="preencoded.png">    </p:cNvPr>
+          <p:cNvPr id="68" name="Image 1" descr="preencoded.png">    </p:cNvPr>
           <p:cNvPicPr>
             <a:picLocks noChangeAspect="1"/>
           </p:cNvPicPr>
@@ -10656,7 +10695,7 @@
       </p:pic>
       <p:sp>
         <p:nvSpPr>
-          <p:cNvPr id="68" name="Text 64"/>
+          <p:cNvPr id="69" name="Text 65"/>
           <p:cNvSpPr/>
           <p:nvPr/>
         </p:nvSpPr>
@@ -10698,7 +10737,7 @@
       </p:sp>
       <p:sp>
         <p:nvSpPr>
-          <p:cNvPr id="69" name="Shape 65"/>
+          <p:cNvPr id="70" name="Shape 66"/>
           <p:cNvSpPr/>
           <p:nvPr/>
         </p:nvSpPr>
@@ -10718,7 +10757,7 @@
       </p:sp>
       <p:pic>
         <p:nvPicPr>
-          <p:cNvPr id="70" name="Image 2" descr="preencoded.png">    </p:cNvPr>
+          <p:cNvPr id="71" name="Image 2" descr="preencoded.png">    </p:cNvPr>
           <p:cNvPicPr>
             <a:picLocks noChangeAspect="1"/>
           </p:cNvPicPr>
@@ -10742,7 +10781,7 @@
       </p:pic>
       <p:sp>
         <p:nvSpPr>
-          <p:cNvPr id="71" name="Text 66"/>
+          <p:cNvPr id="72" name="Text 67"/>
           <p:cNvSpPr/>
           <p:nvPr/>
         </p:nvSpPr>
@@ -10784,7 +10823,7 @@
       </p:sp>
       <p:sp>
         <p:nvSpPr>
-          <p:cNvPr id="72" name="Text 67"/>
+          <p:cNvPr id="73" name="Text 68"/>
           <p:cNvSpPr/>
           <p:nvPr/>
         </p:nvSpPr>
@@ -10823,7 +10862,7 @@
       </p:sp>
       <p:sp>
         <p:nvSpPr>
-          <p:cNvPr id="73" name="Text 68"/>
+          <p:cNvPr id="74" name="Text 69"/>
           <p:cNvSpPr/>
           <p:nvPr/>
         </p:nvSpPr>
